--- a/Rashmi_Slides.pptx
+++ b/Rashmi_Slides.pptx
@@ -120,7 +120,7 @@
   <pc:docChgLst>
     <pc:chgData name="Rashmi Bhat Kekanaje" userId="33b2e9ea-e347-4a93-907a-aa92300ac3d3" providerId="ADAL" clId="{79AD01B1-C200-4FAB-8E05-6A4BF7F578BF}"/>
     <pc:docChg chg="mod delSld modMainMaster">
-      <pc:chgData name="Rashmi Bhat Kekanaje" userId="33b2e9ea-e347-4a93-907a-aa92300ac3d3" providerId="ADAL" clId="{79AD01B1-C200-4FAB-8E05-6A4BF7F578BF}" dt="2026-04-11T09:31:32.498" v="2" actId="33475"/>
+      <pc:chgData name="Rashmi Bhat Kekanaje" userId="33b2e9ea-e347-4a93-907a-aa92300ac3d3" providerId="ADAL" clId="{79AD01B1-C200-4FAB-8E05-6A4BF7F578BF}" dt="2026-04-11T09:39:44.933" v="4" actId="33475"/>
       <pc:docMkLst>
         <pc:docMk/>
       </pc:docMkLst>
@@ -131,22 +131,22 @@
           <pc:sldMk cId="0" sldId="260"/>
         </pc:sldMkLst>
       </pc:sldChg>
-      <pc:sldMasterChg chg="addSp mod">
-        <pc:chgData name="Rashmi Bhat Kekanaje" userId="33b2e9ea-e347-4a93-907a-aa92300ac3d3" providerId="ADAL" clId="{79AD01B1-C200-4FAB-8E05-6A4BF7F578BF}" dt="2026-04-11T09:31:32.494" v="1" actId="33475"/>
+      <pc:sldMasterChg chg="addSp delSp mod">
+        <pc:chgData name="Rashmi Bhat Kekanaje" userId="33b2e9ea-e347-4a93-907a-aa92300ac3d3" providerId="ADAL" clId="{79AD01B1-C200-4FAB-8E05-6A4BF7F578BF}" dt="2026-04-11T09:39:44.933" v="3" actId="33475"/>
         <pc:sldMasterMkLst>
           <pc:docMk/>
           <pc:sldMasterMk cId="0" sldId="2147483648"/>
         </pc:sldMasterMkLst>
-        <pc:spChg chg="add">
-          <ac:chgData name="Rashmi Bhat Kekanaje" userId="33b2e9ea-e347-4a93-907a-aa92300ac3d3" providerId="ADAL" clId="{79AD01B1-C200-4FAB-8E05-6A4BF7F578BF}" dt="2026-04-11T09:31:32.494" v="1" actId="33475"/>
+        <pc:spChg chg="add del">
+          <ac:chgData name="Rashmi Bhat Kekanaje" userId="33b2e9ea-e347-4a93-907a-aa92300ac3d3" providerId="ADAL" clId="{79AD01B1-C200-4FAB-8E05-6A4BF7F578BF}" dt="2026-04-11T09:39:44.933" v="3" actId="33475"/>
           <ac:spMkLst>
             <pc:docMk/>
             <pc:sldMasterMk cId="0" sldId="2147483648"/>
             <ac:spMk id="4" creationId="{266463ED-0E11-A77B-69DD-BCD925893BDC}"/>
           </ac:spMkLst>
         </pc:spChg>
-        <pc:spChg chg="add">
-          <ac:chgData name="Rashmi Bhat Kekanaje" userId="33b2e9ea-e347-4a93-907a-aa92300ac3d3" providerId="ADAL" clId="{79AD01B1-C200-4FAB-8E05-6A4BF7F578BF}" dt="2026-04-11T09:31:32.494" v="1" actId="33475"/>
+        <pc:spChg chg="add del">
+          <ac:chgData name="Rashmi Bhat Kekanaje" userId="33b2e9ea-e347-4a93-907a-aa92300ac3d3" providerId="ADAL" clId="{79AD01B1-C200-4FAB-8E05-6A4BF7F578BF}" dt="2026-04-11T09:39:44.933" v="3" actId="33475"/>
           <ac:spMkLst>
             <pc:docMk/>
             <pc:sldMasterMk cId="0" sldId="2147483648"/>
@@ -684,104 +684,6 @@
           <a:chExt cx="0" cy="0"/>
         </a:xfrm>
       </p:grpSpPr>
-      <p:sp>
-        <p:nvSpPr>
-          <p:cNvPr id="4" name="TextBox 3">
-            <a:extLst>
-              <a:ext uri="{FF2B5EF4-FFF2-40B4-BE49-F238E27FC236}">
-                <a16:creationId xmlns:a16="http://schemas.microsoft.com/office/drawing/2014/main" id="{266463ED-0E11-A77B-69DD-BCD925893BDC}"/>
-              </a:ext>
-            </a:extLst>
-          </p:cNvPr>
-          <p:cNvSpPr txBox="1"/>
-          <p:nvPr userDrawn="1">
-            <p:extLst>
-              <p:ext uri="{1162E1C5-73C7-4A58-AE30-91384D911F3F}">
-                <p184:classification xmlns:p184="http://schemas.microsoft.com/office/powerpoint/2018/4/main" val="hdr"/>
-              </p:ext>
-            </p:extLst>
-          </p:nvPr>
-        </p:nvSpPr>
-        <p:spPr>
-          <a:xfrm>
-            <a:off x="63500" y="63500"/>
-            <a:ext cx="1341438" cy="182880"/>
-          </a:xfrm>
-          <a:prstGeom prst="rect">
-            <a:avLst/>
-          </a:prstGeom>
-        </p:spPr>
-        <p:txBody>
-          <a:bodyPr horzOverflow="overflow" lIns="0" tIns="0" rIns="0" bIns="0">
-            <a:spAutoFit/>
-          </a:bodyPr>
-          <a:lstStyle/>
-          <a:p>
-            <a:pPr algn="l"/>
-            <a:r>
-              <a:rPr lang="en-US" sz="1200">
-                <a:solidFill>
-                  <a:srgbClr val="000000">
-                    <a:alpha val="50000"/>
-                  </a:srgbClr>
-                </a:solidFill>
-                <a:latin typeface="Arial" panose="020B0604020202020204" pitchFamily="34" charset="0"/>
-                <a:cs typeface="Arial" panose="020B0604020202020204" pitchFamily="34" charset="0"/>
-              </a:rPr>
-              <a:t>Micron Confidential</a:t>
-            </a:r>
-          </a:p>
-        </p:txBody>
-      </p:sp>
-      <p:sp>
-        <p:nvSpPr>
-          <p:cNvPr id="5" name="TextBox 4">
-            <a:extLst>
-              <a:ext uri="{FF2B5EF4-FFF2-40B4-BE49-F238E27FC236}">
-                <a16:creationId xmlns:a16="http://schemas.microsoft.com/office/drawing/2014/main" id="{BFD6F6AE-0276-2D7D-4D0E-3706F03A3357}"/>
-              </a:ext>
-            </a:extLst>
-          </p:cNvPr>
-          <p:cNvSpPr txBox="1"/>
-          <p:nvPr userDrawn="1">
-            <p:extLst>
-              <p:ext uri="{1162E1C5-73C7-4A58-AE30-91384D911F3F}">
-                <p184:classification xmlns:p184="http://schemas.microsoft.com/office/powerpoint/2018/4/main" val="ftr"/>
-              </p:ext>
-            </p:extLst>
-          </p:nvPr>
-        </p:nvSpPr>
-        <p:spPr>
-          <a:xfrm>
-            <a:off x="63500" y="6611620"/>
-            <a:ext cx="1341438" cy="182880"/>
-          </a:xfrm>
-          <a:prstGeom prst="rect">
-            <a:avLst/>
-          </a:prstGeom>
-        </p:spPr>
-        <p:txBody>
-          <a:bodyPr horzOverflow="overflow" lIns="0" tIns="0" rIns="0" bIns="0">
-            <a:spAutoFit/>
-          </a:bodyPr>
-          <a:lstStyle/>
-          <a:p>
-            <a:pPr algn="l"/>
-            <a:r>
-              <a:rPr lang="en-US" sz="1200">
-                <a:solidFill>
-                  <a:srgbClr val="000000">
-                    <a:alpha val="50000"/>
-                  </a:srgbClr>
-                </a:solidFill>
-                <a:latin typeface="Arial" panose="020B0604020202020204" pitchFamily="34" charset="0"/>
-                <a:cs typeface="Arial" panose="020B0604020202020204" pitchFamily="34" charset="0"/>
-              </a:rPr>
-              <a:t>Micron Confidential</a:t>
-            </a:r>
-          </a:p>
-        </p:txBody>
-      </p:sp>
     </p:spTree>
   </p:cSld>
   <p:clrMap bg1="lt1" tx1="dk1" bg2="lt2" tx2="dk2" accent1="accent1" accent2="accent2" accent3="accent3" accent4="accent4" accent5="accent5" accent6="accent6" hlink="hlink" folHlink="folHlink"/>
@@ -1810,6 +1712,6 @@
 
 <file path=docMetadata/LabelInfo.xml><?xml version="1.0" encoding="utf-8"?>
 <clbl:labelList xmlns:clbl="http://schemas.microsoft.com/office/2020/mipLabelMetadata">
-  <clbl:label id="{37874100-6000-43b6-a204-2d77792600b9}" enabled="1" method="Standard" siteId="{f38a5ecd-2813-4862-b11b-ac1d563c806f}" removed="0"/>
+  <clbl:label id="{6fdea275-d6f3-438f-b8d8-013cab2023d3}" enabled="1" method="Privileged" siteId="{f38a5ecd-2813-4862-b11b-ac1d563c806f}" removed="0"/>
 </clbl:labelList>
 </file>